--- a/data/deep_dives/carteira_galleria_home_equity_9fc7fccb/exports/documentary_comparison.pptx
+++ b/data/deep_dives/carteira_galleria_home_equity_9fc7fccb/exports/documentary_comparison.pptx
@@ -4286,7 +4286,7 @@
                       <a:r>
                         <a:rPr sz="1300" b="1">
                           <a:solidFill>
-                            <a:srgbClr val="1F1F1F"/>
+                            <a:srgbClr val="FFFFFF"/>
                           </a:solidFill>
                           <a:latin typeface="Calibri"/>
                         </a:rPr>
@@ -4296,7 +4296,7 @@
                   </a:txBody>
                   <a:tcPr marL="91440" marR="91440" marT="41148" marB="41148" anchor="ctr">
                     <a:solidFill>
-                      <a:srgbClr val="EC7000"/>
+                      <a:srgbClr val="FF6200"/>
                     </a:solidFill>
                     <a:lnL>
                       <a:noFill/>
@@ -4335,7 +4335,7 @@
                       <a:r>
                         <a:rPr sz="1300" b="1">
                           <a:solidFill>
-                            <a:srgbClr val="1F1F1F"/>
+                            <a:srgbClr val="FFFFFF"/>
                           </a:solidFill>
                           <a:latin typeface="Calibri"/>
                         </a:rPr>
@@ -4345,7 +4345,7 @@
                   </a:txBody>
                   <a:tcPr marL="91440" marR="91440" marT="41148" marB="41148" anchor="ctr">
                     <a:solidFill>
-                      <a:srgbClr val="EC7000"/>
+                      <a:srgbClr val="FF6200"/>
                     </a:solidFill>
                     <a:lnL>
                       <a:noFill/>
@@ -5145,7 +5145,7 @@
                       <a:r>
                         <a:rPr sz="1300" b="1">
                           <a:solidFill>
-                            <a:srgbClr val="1F1F1F"/>
+                            <a:srgbClr val="FFFFFF"/>
                           </a:solidFill>
                           <a:latin typeface="Calibri"/>
                         </a:rPr>
@@ -5155,7 +5155,7 @@
                   </a:txBody>
                   <a:tcPr marL="91440" marR="91440" marT="41148" marB="41148" anchor="ctr">
                     <a:solidFill>
-                      <a:srgbClr val="EC7000"/>
+                      <a:srgbClr val="FF6200"/>
                     </a:solidFill>
                     <a:lnL>
                       <a:noFill/>
@@ -5194,7 +5194,7 @@
                       <a:r>
                         <a:rPr sz="1300" b="1">
                           <a:solidFill>
-                            <a:srgbClr val="1F1F1F"/>
+                            <a:srgbClr val="FFFFFF"/>
                           </a:solidFill>
                           <a:latin typeface="Calibri"/>
                         </a:rPr>
@@ -5204,7 +5204,7 @@
                   </a:txBody>
                   <a:tcPr marL="91440" marR="91440" marT="41148" marB="41148" anchor="ctr">
                     <a:solidFill>
-                      <a:srgbClr val="EC7000"/>
+                      <a:srgbClr val="FF6200"/>
                     </a:solidFill>
                     <a:lnL>
                       <a:noFill/>
@@ -5930,7 +5930,7 @@
                       <a:r>
                         <a:rPr sz="1300" b="1">
                           <a:solidFill>
-                            <a:srgbClr val="1F1F1F"/>
+                            <a:srgbClr val="FFFFFF"/>
                           </a:solidFill>
                           <a:latin typeface="Calibri"/>
                         </a:rPr>
@@ -5940,7 +5940,7 @@
                   </a:txBody>
                   <a:tcPr marL="91440" marR="91440" marT="41148" marB="41148" anchor="ctr">
                     <a:solidFill>
-                      <a:srgbClr val="EC7000"/>
+                      <a:srgbClr val="FF6200"/>
                     </a:solidFill>
                     <a:lnL>
                       <a:noFill/>
@@ -5979,7 +5979,7 @@
                       <a:r>
                         <a:rPr sz="1300" b="1">
                           <a:solidFill>
-                            <a:srgbClr val="1F1F1F"/>
+                            <a:srgbClr val="FFFFFF"/>
                           </a:solidFill>
                           <a:latin typeface="Calibri"/>
                         </a:rPr>
@@ -5989,7 +5989,7 @@
                   </a:txBody>
                   <a:tcPr marL="91440" marR="91440" marT="41148" marB="41148" anchor="ctr">
                     <a:solidFill>
-                      <a:srgbClr val="EC7000"/>
+                      <a:srgbClr val="FF6200"/>
                     </a:solidFill>
                     <a:lnL>
                       <a:noFill/>
@@ -6767,7 +6767,7 @@
                       <a:r>
                         <a:rPr sz="1300" b="1">
                           <a:solidFill>
-                            <a:srgbClr val="1F1F1F"/>
+                            <a:srgbClr val="FFFFFF"/>
                           </a:solidFill>
                           <a:latin typeface="Calibri"/>
                         </a:rPr>
@@ -6777,7 +6777,7 @@
                   </a:txBody>
                   <a:tcPr marL="91440" marR="91440" marT="41148" marB="41148" anchor="ctr">
                     <a:solidFill>
-                      <a:srgbClr val="EC7000"/>
+                      <a:srgbClr val="FF6200"/>
                     </a:solidFill>
                     <a:lnL>
                       <a:noFill/>
@@ -6816,7 +6816,7 @@
                       <a:r>
                         <a:rPr sz="1300" b="1">
                           <a:solidFill>
-                            <a:srgbClr val="1F1F1F"/>
+                            <a:srgbClr val="FFFFFF"/>
                           </a:solidFill>
                           <a:latin typeface="Calibri"/>
                         </a:rPr>
@@ -6826,7 +6826,7 @@
                   </a:txBody>
                   <a:tcPr marL="91440" marR="91440" marT="41148" marB="41148" anchor="ctr">
                     <a:solidFill>
-                      <a:srgbClr val="EC7000"/>
+                      <a:srgbClr val="FF6200"/>
                     </a:solidFill>
                     <a:lnL>
                       <a:noFill/>
@@ -7412,7 +7412,7 @@
                       <a:r>
                         <a:rPr sz="1300" b="1">
                           <a:solidFill>
-                            <a:srgbClr val="1F1F1F"/>
+                            <a:srgbClr val="FFFFFF"/>
                           </a:solidFill>
                           <a:latin typeface="Calibri"/>
                         </a:rPr>
@@ -7422,7 +7422,7 @@
                   </a:txBody>
                   <a:tcPr marL="91440" marR="91440" marT="41148" marB="41148" anchor="ctr">
                     <a:solidFill>
-                      <a:srgbClr val="EC7000"/>
+                      <a:srgbClr val="FF6200"/>
                     </a:solidFill>
                     <a:lnL>
                       <a:noFill/>
@@ -7461,7 +7461,7 @@
                       <a:r>
                         <a:rPr sz="1300" b="1">
                           <a:solidFill>
-                            <a:srgbClr val="1F1F1F"/>
+                            <a:srgbClr val="FFFFFF"/>
                           </a:solidFill>
                           <a:latin typeface="Calibri"/>
                         </a:rPr>
@@ -7471,7 +7471,7 @@
                   </a:txBody>
                   <a:tcPr marL="91440" marR="91440" marT="41148" marB="41148" anchor="ctr">
                     <a:solidFill>
-                      <a:srgbClr val="EC7000"/>
+                      <a:srgbClr val="FF6200"/>
                     </a:solidFill>
                     <a:lnL>
                       <a:noFill/>
@@ -7757,7 +7757,7 @@
                           </a:solidFill>
                           <a:latin typeface="Calibri"/>
                         </a:rPr>
-                        <a:t>Resgate no 328º mês completo de alocação; saída no 96º mês; data fechada não localizada</a:t>
+                        <a:t>Resgate no 328º mês completo de alocação; saída no 96º mês</a:t>
                       </a:r>
                     </a:p>
                   </a:txBody>
@@ -7961,7 +7961,7 @@
                       <a:r>
                         <a:rPr sz="1300" b="1">
                           <a:solidFill>
-                            <a:srgbClr val="1F1F1F"/>
+                            <a:srgbClr val="FFFFFF"/>
                           </a:solidFill>
                           <a:latin typeface="Calibri"/>
                         </a:rPr>
@@ -7971,7 +7971,7 @@
                   </a:txBody>
                   <a:tcPr marL="91440" marR="91440" marT="41148" marB="41148" anchor="ctr">
                     <a:solidFill>
-                      <a:srgbClr val="EC7000"/>
+                      <a:srgbClr val="FF6200"/>
                     </a:solidFill>
                     <a:lnL>
                       <a:noFill/>
@@ -8010,7 +8010,7 @@
                       <a:r>
                         <a:rPr sz="1300" b="1">
                           <a:solidFill>
-                            <a:srgbClr val="1F1F1F"/>
+                            <a:srgbClr val="FFFFFF"/>
                           </a:solidFill>
                           <a:latin typeface="Calibri"/>
                         </a:rPr>
@@ -8020,7 +8020,7 @@
                   </a:txBody>
                   <a:tcPr marL="91440" marR="91440" marT="41148" marB="41148" anchor="ctr">
                     <a:solidFill>
-                      <a:srgbClr val="EC7000"/>
+                      <a:srgbClr val="FF6200"/>
                     </a:solidFill>
                     <a:lnL>
                       <a:noFill/>
@@ -8606,7 +8606,7 @@
                       <a:r>
                         <a:rPr sz="1300" b="1">
                           <a:solidFill>
-                            <a:srgbClr val="1F1F1F"/>
+                            <a:srgbClr val="FFFFFF"/>
                           </a:solidFill>
                           <a:latin typeface="Calibri"/>
                         </a:rPr>
@@ -8616,7 +8616,7 @@
                   </a:txBody>
                   <a:tcPr marL="91440" marR="91440" marT="41148" marB="41148" anchor="ctr">
                     <a:solidFill>
-                      <a:srgbClr val="EC7000"/>
+                      <a:srgbClr val="FF6200"/>
                     </a:solidFill>
                     <a:lnL>
                       <a:noFill/>
@@ -8655,7 +8655,7 @@
                       <a:r>
                         <a:rPr sz="1300" b="1">
                           <a:solidFill>
-                            <a:srgbClr val="1F1F1F"/>
+                            <a:srgbClr val="FFFFFF"/>
                           </a:solidFill>
                           <a:latin typeface="Calibri"/>
                         </a:rPr>
@@ -8665,7 +8665,7 @@
                   </a:txBody>
                   <a:tcPr marL="91440" marR="91440" marT="41148" marB="41148" anchor="ctr">
                     <a:solidFill>
-                      <a:srgbClr val="EC7000"/>
+                      <a:srgbClr val="FF6200"/>
                     </a:solidFill>
                     <a:lnL>
                       <a:noFill/>
@@ -8779,7 +8779,7 @@
                           </a:solidFill>
                           <a:latin typeface="Calibri"/>
                         </a:rPr>
-                        <a:t>Direitos creditórios / PL e cotas subordinadas / PL; validar fórmula contratual antes de comparar</a:t>
+                        <a:t>Direitos creditórios / PL e cotas subordinadas / PL</a:t>
                       </a:r>
                     </a:p>
                   </a:txBody>
@@ -9069,7 +9069,7 @@
                           </a:solidFill>
                           <a:latin typeface="Calibri"/>
                         </a:rPr>
-                        <a:t>Sem competência IME carregada em cache local</a:t>
+                        <a:t>-</a:t>
                       </a:r>
                     </a:p>
                   </a:txBody>
